--- a/public/fun/pack/pptx/reviewpro/보장점검양식프리미엄_10_사업장점검_올리브샴페인.pptx
+++ b/public/fun/pack/pptx/reviewpro/보장점검양식프리미엄_10_사업장점검_올리브샴페인.pptx
@@ -112,12 +112,12 @@
   <p:extLst>
     <p:ext uri="{521415D9-36F7-43E2-AB2F-B90AF26B5E84}">
       <p14:sectionLst xmlns:p14="http://schemas.microsoft.com/office/powerpoint/2010/main">
-        <p14:section name="시작" id="{8E6B958D-A5E4-430F-838B-CB05614F2D1C}">
+        <p14:section name="시작" id="{2F852E54-CAD1-4EF7-8971-084EB32F1AEF}">
           <p14:sldIdLst>
             <p14:sldId id="256"/>
           </p14:sldIdLst>
         </p14:section>
-        <p14:section name="본문" id="{83875432-3A4D-4341-BB6A-01A9B20FBED0}">
+        <p14:section name="본문" id="{8B7A9DDC-E502-427B-928C-97C8771EA8AF}">
           <p14:sldIdLst>
             <p14:sldId id="257"/>
             <p14:sldId id="258"/>
@@ -1538,7 +1538,7 @@
             </a:lvl1pPr>
           </a:lstStyle>
           <a:p>
-            <a:fld id="{919AB077-B5CF-41DC-9296-FC8E1D875022}" type="slidenum">
+            <a:fld id="{35F1FCDE-F55E-454D-8E98-D210CC4A12D1}" type="slidenum">
               <a:rPr lang="en-US"/>
               <a:t>‹#›</a:t>
             </a:fld>
@@ -2146,7 +2146,7 @@
             </a:lvl1pPr>
           </a:lstStyle>
           <a:p>
-            <a:fld id="{E01CA9A6-D127-4A96-9E13-4B2DF984B26A}" type="slidenum">
+            <a:fld id="{E2FAC047-255C-41E5-813B-6E1EED054E91}" type="slidenum">
               <a:rPr lang="en-US"/>
               <a:t>‹#›</a:t>
             </a:fld>
@@ -2783,7 +2783,7 @@
             </a:lvl1pPr>
           </a:lstStyle>
           <a:p>
-            <a:fld id="{59B85739-FFB1-4360-9AAD-2436D32D78F6}" type="slidenum">
+            <a:fld id="{9BD0823C-3DBE-45CE-9C68-D03A8A6F1322}" type="slidenum">
               <a:rPr lang="en-US"/>
               <a:t>‹#›</a:t>
             </a:fld>
@@ -3644,7 +3644,7 @@
           <a:p>
             <a:r>
               <a:rPr lang="ko-KR"/>
-              <a:t>사업장 점검 · 0000. 00. 00</a:t>
+              <a:t>사업장 점검 · 날짜 입력</a:t>
             </a:r>
           </a:p>
           <a:p>
@@ -3735,7 +3735,7 @@
           <a:bodyPr/>
           <a:lstStyle/>
           <a:p>
-            <a:fld id="{3A925E68-EAFC-4F46-8263-6880F7E2E884}" type="slidenum">
+            <a:fld id="{2BE7482C-3055-4690-B46B-10DED3E7B9F1}" type="slidenum">
               <a:rPr lang="en-US"/>
               <a:t>‹#›</a:t>
             </a:fld>
@@ -4251,7 +4251,7 @@
           <a:bodyPr/>
           <a:lstStyle/>
           <a:p>
-            <a:fld id="{1E092617-AD95-4F13-BEDB-4D9AFC63D068}" type="slidenum">
+            <a:fld id="{50E8C27C-EE08-40BF-9564-ECB48E84E32B}" type="slidenum">
               <a:rPr lang="en-US"/>
               <a:t>‹#›</a:t>
             </a:fld>
@@ -5757,7 +5757,7 @@
           <a:bodyPr/>
           <a:lstStyle/>
           <a:p>
-            <a:fld id="{4994C090-4125-4483-9EDE-0BB69B5964D3}" type="slidenum">
+            <a:fld id="{6727C304-9815-480E-8201-204DE8F9C5ED}" type="slidenum">
               <a:rPr lang="en-US"/>
               <a:t>‹#›</a:t>
             </a:fld>
@@ -7307,7 +7307,7 @@
           <a:bodyPr/>
           <a:lstStyle/>
           <a:p>
-            <a:fld id="{CA41EC67-82C2-458E-AA46-FD9B15DD6DE1}" type="slidenum">
+            <a:fld id="{E5D5AB41-1C53-4BA0-84C2-41280DA2AE0A}" type="slidenum">
               <a:rPr lang="en-US"/>
               <a:t>‹#›</a:t>
             </a:fld>
@@ -8253,7 +8253,7 @@
           <a:bodyPr/>
           <a:lstStyle/>
           <a:p>
-            <a:fld id="{CD14CDE0-3F5B-4C74-A0DD-074D8EB25BDF}" type="slidenum">
+            <a:fld id="{AB810940-8DE1-4066-9677-6A5F7CD77A64}" type="slidenum">
               <a:rPr lang="en-US"/>
               <a:t>‹#›</a:t>
             </a:fld>
